--- a/module-05-dijkstra/slides/07-obstacle-detection.pptx
+++ b/module-05-dijkstra/slides/07-obstacle-detection.pptx
@@ -3172,7 +3172,7 @@
               </a:defRPr>
             </a:pPr>
             <a:r>
-              <a:t>Module 5: Dijkstra's Algorithm</a:t>
+              <a:t>Module 5: Dijkstra</a:t>
             </a:r>
           </a:p>
         </p:txBody>
@@ -4862,7 +4862,7 @@
               <a:spcAft>
                 <a:spcPts val="100"/>
               </a:spcAft>
-              <a:defRPr sz="1300">
+              <a:defRPr sz="1800">
                 <a:solidFill>
                   <a:srgbClr val="333333"/>
                 </a:solidFill>
@@ -4878,7 +4878,7 @@
               <a:spcAft>
                 <a:spcPts val="100"/>
               </a:spcAft>
-              <a:defRPr sz="1300">
+              <a:defRPr sz="1800">
                 <a:solidFill>
                   <a:srgbClr val="333333"/>
                 </a:solidFill>
@@ -4891,7 +4891,7 @@
               <a:spcAft>
                 <a:spcPts val="100"/>
               </a:spcAft>
-              <a:defRPr sz="1300">
+              <a:defRPr sz="1800">
                 <a:solidFill>
                   <a:srgbClr val="333333"/>
                 </a:solidFill>
@@ -4907,7 +4907,7 @@
               <a:spcAft>
                 <a:spcPts val="100"/>
               </a:spcAft>
-              <a:defRPr sz="1300">
+              <a:defRPr sz="1800">
                 <a:solidFill>
                   <a:srgbClr val="333333"/>
                 </a:solidFill>
@@ -5575,7 +5575,7 @@
               <a:spcAft>
                 <a:spcPts val="100"/>
               </a:spcAft>
-              <a:defRPr sz="1300">
+              <a:defRPr sz="1800">
                 <a:solidFill>
                   <a:srgbClr val="333333"/>
                 </a:solidFill>
@@ -5591,7 +5591,7 @@
               <a:spcAft>
                 <a:spcPts val="100"/>
               </a:spcAft>
-              <a:defRPr sz="1300">
+              <a:defRPr sz="1800">
                 <a:solidFill>
                   <a:srgbClr val="333333"/>
                 </a:solidFill>
@@ -5607,7 +5607,7 @@
               <a:spcAft>
                 <a:spcPts val="100"/>
               </a:spcAft>
-              <a:defRPr sz="1300">
+              <a:defRPr sz="1800">
                 <a:solidFill>
                   <a:srgbClr val="333333"/>
                 </a:solidFill>
@@ -5691,7 +5691,7 @@
               <a:spcAft>
                 <a:spcPts val="100"/>
               </a:spcAft>
-              <a:defRPr sz="1300">
+              <a:defRPr sz="1800">
                 <a:solidFill>
                   <a:srgbClr val="333333"/>
                 </a:solidFill>
@@ -5707,7 +5707,7 @@
               <a:spcAft>
                 <a:spcPts val="100"/>
               </a:spcAft>
-              <a:defRPr sz="1300">
+              <a:defRPr sz="1800">
                 <a:solidFill>
                   <a:srgbClr val="333333"/>
                 </a:solidFill>
@@ -5723,7 +5723,7 @@
               <a:spcAft>
                 <a:spcPts val="100"/>
               </a:spcAft>
-              <a:defRPr sz="1300">
+              <a:defRPr sz="1800">
                 <a:solidFill>
                   <a:srgbClr val="333333"/>
                 </a:solidFill>
@@ -5940,7 +5940,7 @@
               <a:spcAft>
                 <a:spcPts val="100"/>
               </a:spcAft>
-              <a:defRPr sz="1300">
+              <a:defRPr sz="1800">
                 <a:solidFill>
                   <a:srgbClr val="333333"/>
                 </a:solidFill>
@@ -5956,7 +5956,7 @@
               <a:spcAft>
                 <a:spcPts val="100"/>
               </a:spcAft>
-              <a:defRPr sz="1300">
+              <a:defRPr sz="1800">
                 <a:solidFill>
                   <a:srgbClr val="333333"/>
                 </a:solidFill>
@@ -5969,7 +5969,7 @@
               <a:spcAft>
                 <a:spcPts val="100"/>
               </a:spcAft>
-              <a:defRPr sz="1300">
+              <a:defRPr sz="1800">
                 <a:solidFill>
                   <a:srgbClr val="333333"/>
                 </a:solidFill>
@@ -5985,7 +5985,7 @@
               <a:spcAft>
                 <a:spcPts val="100"/>
               </a:spcAft>
-              <a:defRPr sz="1300">
+              <a:defRPr sz="1800">
                 <a:solidFill>
                   <a:srgbClr val="333333"/>
                 </a:solidFill>
@@ -5998,7 +5998,7 @@
               <a:spcAft>
                 <a:spcPts val="100"/>
               </a:spcAft>
-              <a:defRPr sz="1300">
+              <a:defRPr sz="1800">
                 <a:solidFill>
                   <a:srgbClr val="333333"/>
                 </a:solidFill>
@@ -6014,7 +6014,7 @@
               <a:spcAft>
                 <a:spcPts val="100"/>
               </a:spcAft>
-              <a:defRPr sz="1300">
+              <a:defRPr sz="1800">
                 <a:solidFill>
                   <a:srgbClr val="333333"/>
                 </a:solidFill>
@@ -6030,7 +6030,7 @@
               <a:spcAft>
                 <a:spcPts val="100"/>
               </a:spcAft>
-              <a:defRPr sz="1300">
+              <a:defRPr sz="1800">
                 <a:solidFill>
                   <a:srgbClr val="333333"/>
                 </a:solidFill>
@@ -6046,7 +6046,7 @@
               <a:spcAft>
                 <a:spcPts val="100"/>
               </a:spcAft>
-              <a:defRPr sz="1300">
+              <a:defRPr sz="1800">
                 <a:solidFill>
                   <a:srgbClr val="333333"/>
                 </a:solidFill>
@@ -6062,7 +6062,7 @@
               <a:spcAft>
                 <a:spcPts val="100"/>
               </a:spcAft>
-              <a:defRPr sz="1300">
+              <a:defRPr sz="1800">
                 <a:solidFill>
                   <a:srgbClr val="333333"/>
                 </a:solidFill>
@@ -6078,7 +6078,7 @@
               <a:spcAft>
                 <a:spcPts val="100"/>
               </a:spcAft>
-              <a:defRPr sz="1300">
+              <a:defRPr sz="1800">
                 <a:solidFill>
                   <a:srgbClr val="333333"/>
                 </a:solidFill>
@@ -6467,7 +6467,7 @@
               <a:spcAft>
                 <a:spcPts val="100"/>
               </a:spcAft>
-              <a:defRPr sz="1300">
+              <a:defRPr sz="1800">
                 <a:solidFill>
                   <a:srgbClr val="333333"/>
                 </a:solidFill>
@@ -6483,7 +6483,7 @@
               <a:spcAft>
                 <a:spcPts val="100"/>
               </a:spcAft>
-              <a:defRPr sz="1300">
+              <a:defRPr sz="1800">
                 <a:solidFill>
                   <a:srgbClr val="333333"/>
                 </a:solidFill>
@@ -6496,7 +6496,7 @@
               <a:spcAft>
                 <a:spcPts val="100"/>
               </a:spcAft>
-              <a:defRPr sz="1300">
+              <a:defRPr sz="1800">
                 <a:solidFill>
                   <a:srgbClr val="333333"/>
                 </a:solidFill>
@@ -6512,7 +6512,7 @@
               <a:spcAft>
                 <a:spcPts val="100"/>
               </a:spcAft>
-              <a:defRPr sz="1300">
+              <a:defRPr sz="1800">
                 <a:solidFill>
                   <a:srgbClr val="333333"/>
                 </a:solidFill>
@@ -6528,7 +6528,7 @@
               <a:spcAft>
                 <a:spcPts val="100"/>
               </a:spcAft>
-              <a:defRPr sz="1300">
+              <a:defRPr sz="1800">
                 <a:solidFill>
                   <a:srgbClr val="333333"/>
                 </a:solidFill>
@@ -6541,7 +6541,7 @@
               <a:spcAft>
                 <a:spcPts val="100"/>
               </a:spcAft>
-              <a:defRPr sz="1300">
+              <a:defRPr sz="1800">
                 <a:solidFill>
                   <a:srgbClr val="333333"/>
                 </a:solidFill>
@@ -6557,7 +6557,7 @@
               <a:spcAft>
                 <a:spcPts val="100"/>
               </a:spcAft>
-              <a:defRPr sz="1300">
+              <a:defRPr sz="1800">
                 <a:solidFill>
                   <a:srgbClr val="333333"/>
                 </a:solidFill>
@@ -6573,7 +6573,7 @@
               <a:spcAft>
                 <a:spcPts val="100"/>
               </a:spcAft>
-              <a:defRPr sz="1300">
+              <a:defRPr sz="1800">
                 <a:solidFill>
                   <a:srgbClr val="333333"/>
                 </a:solidFill>
@@ -6589,7 +6589,7 @@
               <a:spcAft>
                 <a:spcPts val="100"/>
               </a:spcAft>
-              <a:defRPr sz="1300">
+              <a:defRPr sz="1800">
                 <a:solidFill>
                   <a:srgbClr val="333333"/>
                 </a:solidFill>
@@ -6605,7 +6605,7 @@
               <a:spcAft>
                 <a:spcPts val="100"/>
               </a:spcAft>
-              <a:defRPr sz="1300">
+              <a:defRPr sz="1800">
                 <a:solidFill>
                   <a:srgbClr val="333333"/>
                 </a:solidFill>
@@ -6689,7 +6689,7 @@
               <a:spcAft>
                 <a:spcPts val="100"/>
               </a:spcAft>
-              <a:defRPr sz="1300">
+              <a:defRPr sz="1800">
                 <a:solidFill>
                   <a:srgbClr val="333333"/>
                 </a:solidFill>
@@ -6705,7 +6705,7 @@
               <a:spcAft>
                 <a:spcPts val="100"/>
               </a:spcAft>
-              <a:defRPr sz="1300">
+              <a:defRPr sz="1800">
                 <a:solidFill>
                   <a:srgbClr val="333333"/>
                 </a:solidFill>
@@ -6721,7 +6721,7 @@
               <a:spcAft>
                 <a:spcPts val="100"/>
               </a:spcAft>
-              <a:defRPr sz="1300">
+              <a:defRPr sz="1800">
                 <a:solidFill>
                   <a:srgbClr val="333333"/>
                 </a:solidFill>
@@ -6826,7 +6826,7 @@
               </a:defRPr>
             </a:pPr>
             <a:r>
-              <a:t>Re-routing After Detection</a:t>
+              <a:t>Which Intersection Is Ahead?</a:t>
             </a:r>
           </a:p>
         </p:txBody>
@@ -6854,7 +6854,10 @@
           <a:lstStyle/>
           <a:p>
             <a:pPr>
-              <a:defRPr sz="1800" b="1">
+              <a:spcAft>
+                <a:spcPts val="400"/>
+              </a:spcAft>
+              <a:defRPr sz="2000" b="1">
                 <a:solidFill>
                   <a:srgbClr val="1B3A5C"/>
                 </a:solidFill>
@@ -6862,8 +6865,21 @@
               </a:defRPr>
             </a:pPr>
             <a:r>
-              <a:t>After discovering a new obstacle, recompute the path using the updated blocked list.</a:t>
-            </a:r>
+              <a:t>Before we can add to the blocked list, we need to know which intersection the rangefinder is pointed at.</a:t>
+            </a:r>
+          </a:p>
+          <a:p>
+            <a:pPr>
+              <a:spcAft>
+                <a:spcPts val="400"/>
+              </a:spcAft>
+              <a:defRPr sz="400" b="0">
+                <a:solidFill>
+                  <a:srgbClr val="000000"/>
+                </a:solidFill>
+                <a:latin typeface="Calibri"/>
+              </a:defRPr>
+            </a:pPr>
           </a:p>
         </p:txBody>
       </p:sp>
@@ -6876,7 +6892,7 @@
         <p:spPr>
           <a:xfrm>
             <a:off x="548640" y="1645920"/>
-            <a:ext cx="5669280" cy="2788920"/>
+            <a:ext cx="10972800" cy="3840480"/>
           </a:xfrm>
           <a:prstGeom prst="roundRect">
             <a:avLst/>
@@ -6921,7 +6937,7 @@
         <p:spPr>
           <a:xfrm>
             <a:off x="731520" y="1737360"/>
-            <a:ext cx="5303520" cy="2606040"/>
+            <a:ext cx="10607040" cy="3657600"/>
           </a:xfrm>
           <a:prstGeom prst="rect">
             <a:avLst/>
@@ -6938,7 +6954,7 @@
               <a:spcAft>
                 <a:spcPts val="100"/>
               </a:spcAft>
-              <a:defRPr sz="1300">
+              <a:defRPr sz="1800">
                 <a:solidFill>
                   <a:srgbClr val="333333"/>
                 </a:solidFill>
@@ -6946,7 +6962,7 @@
               </a:defRPr>
             </a:pPr>
             <a:r>
-              <a:t>from dijkstra import Dijkstra</a:t>
+              <a:t>NORTH = 0</a:t>
             </a:r>
           </a:p>
           <a:p>
@@ -6954,20 +6970,23 @@
               <a:spcAft>
                 <a:spcPts val="100"/>
               </a:spcAft>
-              <a:defRPr sz="1300">
+              <a:defRPr sz="1800">
                 <a:solidFill>
                   <a:srgbClr val="333333"/>
                 </a:solidFill>
                 <a:latin typeface="Courier New"/>
               </a:defRPr>
             </a:pPr>
+            <a:r>
+              <a:t>EAST = 1</a:t>
+            </a:r>
           </a:p>
           <a:p>
             <a:pPr>
               <a:spcAft>
                 <a:spcPts val="100"/>
               </a:spcAft>
-              <a:defRPr sz="1300">
+              <a:defRPr sz="1800">
                 <a:solidFill>
                   <a:srgbClr val="333333"/>
                 </a:solidFill>
@@ -6975,7 +6994,7 @@
               </a:defRPr>
             </a:pPr>
             <a:r>
-              <a:t>blocked_nodes = [(1, 3)]  # discovered so far</a:t>
+              <a:t>SOUTH = 2</a:t>
             </a:r>
           </a:p>
           <a:p>
@@ -6983,36 +7002,36 @@
               <a:spcAft>
                 <a:spcPts val="100"/>
               </a:spcAft>
-              <a:defRPr sz="1300">
+              <a:defRPr sz="1800">
                 <a:solidFill>
                   <a:srgbClr val="333333"/>
                 </a:solidFill>
                 <a:latin typeface="Courier New"/>
               </a:defRPr>
             </a:pPr>
+            <a:r>
+              <a:t>WEST = 3</a:t>
+            </a:r>
           </a:p>
           <a:p>
             <a:pPr>
               <a:spcAft>
                 <a:spcPts val="100"/>
               </a:spcAft>
-              <a:defRPr sz="1300">
+              <a:defRPr sz="1800">
                 <a:solidFill>
                   <a:srgbClr val="333333"/>
                 </a:solidFill>
                 <a:latin typeface="Courier New"/>
               </a:defRPr>
             </a:pPr>
-            <a:r>
-              <a:t># Robot is at (1, 2), heading to (3, 3)</a:t>
-            </a:r>
           </a:p>
           <a:p>
             <a:pPr>
               <a:spcAft>
                 <a:spcPts val="100"/>
               </a:spcAft>
-              <a:defRPr sz="1300">
+              <a:defRPr sz="1800">
                 <a:solidFill>
                   <a:srgbClr val="333333"/>
                 </a:solidFill>
@@ -7020,7 +7039,7 @@
               </a:defRPr>
             </a:pPr>
             <a:r>
-              <a:t># Obstacle detected ahead at (1, 3) — already added to blocked_nodes</a:t>
+              <a:t>def get_next_intersection(current_pos, heading):</a:t>
             </a:r>
           </a:p>
           <a:p>
@@ -7028,20 +7047,23 @@
               <a:spcAft>
                 <a:spcPts val="100"/>
               </a:spcAft>
-              <a:defRPr sz="1300">
+              <a:defRPr sz="1800">
                 <a:solidFill>
                   <a:srgbClr val="333333"/>
                 </a:solidFill>
                 <a:latin typeface="Courier New"/>
               </a:defRPr>
             </a:pPr>
+            <a:r>
+              <a:t>    """Return the intersection directly ahead of the robot."""</a:t>
+            </a:r>
           </a:p>
           <a:p>
             <a:pPr>
               <a:spcAft>
                 <a:spcPts val="100"/>
               </a:spcAft>
-              <a:defRPr sz="1300">
+              <a:defRPr sz="1800">
                 <a:solidFill>
                   <a:srgbClr val="333333"/>
                 </a:solidFill>
@@ -7049,7 +7071,7 @@
               </a:defRPr>
             </a:pPr>
             <a:r>
-              <a:t># Recompute path from current position with updated blocked list</a:t>
+              <a:t>    row, col = current_pos</a:t>
             </a:r>
           </a:p>
           <a:p>
@@ -7057,7 +7079,7 @@
               <a:spcAft>
                 <a:spcPts val="100"/>
               </a:spcAft>
-              <a:defRPr sz="1300">
+              <a:defRPr sz="1800">
                 <a:solidFill>
                   <a:srgbClr val="333333"/>
                 </a:solidFill>
@@ -7065,7 +7087,7 @@
               </a:defRPr>
             </a:pPr>
             <a:r>
-              <a:t>pathfinder = Dijkstra((1, 2), blocked_nodes)</a:t>
+              <a:t>    if heading == NORTH:</a:t>
             </a:r>
           </a:p>
           <a:p>
@@ -7073,7 +7095,7 @@
               <a:spcAft>
                 <a:spcPts val="100"/>
               </a:spcAft>
-              <a:defRPr sz="1300">
+              <a:defRPr sz="1800">
                 <a:solidFill>
                   <a:srgbClr val="333333"/>
                 </a:solidFill>
@@ -7081,7 +7103,7 @@
               </a:defRPr>
             </a:pPr>
             <a:r>
-              <a:t>new_path = pathfinder.compute_path((3, 3))</a:t>
+              <a:t>        return (row - 1, col)</a:t>
             </a:r>
           </a:p>
           <a:p>
@@ -7089,7 +7111,7 @@
               <a:spcAft>
                 <a:spcPts val="100"/>
               </a:spcAft>
-              <a:defRPr sz="1300">
+              <a:defRPr sz="1800">
                 <a:solidFill>
                   <a:srgbClr val="333333"/>
                 </a:solidFill>
@@ -7097,7 +7119,87 @@
               </a:defRPr>
             </a:pPr>
             <a:r>
-              <a:t>print("New path:", new_path)</a:t>
+              <a:t>    elif heading == EAST:</a:t>
+            </a:r>
+          </a:p>
+          <a:p>
+            <a:pPr>
+              <a:spcAft>
+                <a:spcPts val="100"/>
+              </a:spcAft>
+              <a:defRPr sz="1800">
+                <a:solidFill>
+                  <a:srgbClr val="333333"/>
+                </a:solidFill>
+                <a:latin typeface="Courier New"/>
+              </a:defRPr>
+            </a:pPr>
+            <a:r>
+              <a:t>        return (row, col + 1)</a:t>
+            </a:r>
+          </a:p>
+          <a:p>
+            <a:pPr>
+              <a:spcAft>
+                <a:spcPts val="100"/>
+              </a:spcAft>
+              <a:defRPr sz="1800">
+                <a:solidFill>
+                  <a:srgbClr val="333333"/>
+                </a:solidFill>
+                <a:latin typeface="Courier New"/>
+              </a:defRPr>
+            </a:pPr>
+            <a:r>
+              <a:t>    elif heading == SOUTH:</a:t>
+            </a:r>
+          </a:p>
+          <a:p>
+            <a:pPr>
+              <a:spcAft>
+                <a:spcPts val="100"/>
+              </a:spcAft>
+              <a:defRPr sz="1800">
+                <a:solidFill>
+                  <a:srgbClr val="333333"/>
+                </a:solidFill>
+                <a:latin typeface="Courier New"/>
+              </a:defRPr>
+            </a:pPr>
+            <a:r>
+              <a:t>        return (row + 1, col)</a:t>
+            </a:r>
+          </a:p>
+          <a:p>
+            <a:pPr>
+              <a:spcAft>
+                <a:spcPts val="100"/>
+              </a:spcAft>
+              <a:defRPr sz="1800">
+                <a:solidFill>
+                  <a:srgbClr val="333333"/>
+                </a:solidFill>
+                <a:latin typeface="Courier New"/>
+              </a:defRPr>
+            </a:pPr>
+            <a:r>
+              <a:t>    elif heading == WEST:</a:t>
+            </a:r>
+          </a:p>
+          <a:p>
+            <a:pPr>
+              <a:spcAft>
+                <a:spcPts val="100"/>
+              </a:spcAft>
+              <a:defRPr sz="1800">
+                <a:solidFill>
+                  <a:srgbClr val="333333"/>
+                </a:solidFill>
+                <a:latin typeface="Courier New"/>
+              </a:defRPr>
+            </a:pPr>
+            <a:r>
+              <a:t>        return (row, col - 1)</a:t>
             </a:r>
           </a:p>
         </p:txBody>
@@ -7110,8 +7212,8 @@
         </p:nvSpPr>
         <p:spPr>
           <a:xfrm>
-            <a:off x="6583680" y="1645920"/>
-            <a:ext cx="5029200" cy="2788920"/>
+            <a:off x="548640" y="5623560"/>
+            <a:ext cx="10972800" cy="365760"/>
           </a:xfrm>
           <a:prstGeom prst="rect">
             <a:avLst/>
@@ -7125,23 +7227,10 @@
           <a:lstStyle/>
           <a:p>
             <a:pPr>
-              <a:defRPr sz="1800" b="1">
-                <a:solidFill>
-                  <a:srgbClr val="1B3A5C"/>
-                </a:solidFill>
-                <a:latin typeface="Calibri"/>
-              </a:defRPr>
-            </a:pPr>
-            <a:r>
-              <a:t>The flow:</a:t>
-            </a:r>
-          </a:p>
-          <a:p>
-            <a:pPr>
               <a:spcAft>
                 <a:spcPts val="400"/>
               </a:spcAft>
-              <a:defRPr sz="1600" b="0">
+              <a:defRPr sz="1700" b="0">
                 <a:solidFill>
                   <a:srgbClr val="000000"/>
                 </a:solidFill>
@@ -7149,7 +7238,7 @@
               </a:defRPr>
             </a:pPr>
             <a:r>
-              <a:t>Robot arrives at intersection</a:t>
+              <a:t>We already have desired_heading() from Module 4 Lesson 8 doing the reverse of this. Here we just need the forward version: given position and heading, what's ahead?</a:t>
             </a:r>
           </a:p>
           <a:p>
@@ -7157,80 +7246,13 @@
               <a:spcAft>
                 <a:spcPts val="400"/>
               </a:spcAft>
-              <a:defRPr sz="1600" b="0">
+              <a:defRPr sz="400" b="0">
                 <a:solidFill>
                   <a:srgbClr val="000000"/>
                 </a:solidFill>
                 <a:latin typeface="Calibri"/>
               </a:defRPr>
             </a:pPr>
-            <a:r>
-              <a:t>Check rangefinder for obstacle ahead</a:t>
-            </a:r>
-          </a:p>
-          <a:p>
-            <a:pPr>
-              <a:spcAft>
-                <a:spcPts val="400"/>
-              </a:spcAft>
-              <a:defRPr sz="1600" b="0">
-                <a:solidFill>
-                  <a:srgbClr val="000000"/>
-                </a:solidFill>
-                <a:latin typeface="Calibri"/>
-              </a:defRPr>
-            </a:pPr>
-            <a:r>
-              <a:t>If blocked: add to blocked list, recompute path from current position</a:t>
-            </a:r>
-          </a:p>
-          <a:p>
-            <a:pPr>
-              <a:spcAft>
-                <a:spcPts val="400"/>
-              </a:spcAft>
-              <a:defRPr sz="1600" b="0">
-                <a:solidFill>
-                  <a:srgbClr val="000000"/>
-                </a:solidFill>
-                <a:latin typeface="Calibri"/>
-              </a:defRPr>
-            </a:pPr>
-            <a:r>
-              <a:t>If clear: continue on current path</a:t>
-            </a:r>
-          </a:p>
-          <a:p>
-            <a:pPr>
-              <a:spcAft>
-                <a:spcPts val="400"/>
-              </a:spcAft>
-              <a:defRPr sz="1600" b="0">
-                <a:solidFill>
-                  <a:srgbClr val="000000"/>
-                </a:solidFill>
-                <a:latin typeface="Calibri"/>
-              </a:defRPr>
-            </a:pPr>
-            <a:r>
-              <a:t>Drive to next intersection</a:t>
-            </a:r>
-          </a:p>
-          <a:p>
-            <a:pPr>
-              <a:spcAft>
-                <a:spcPts val="400"/>
-              </a:spcAft>
-              <a:defRPr sz="1600" b="0">
-                <a:solidFill>
-                  <a:srgbClr val="000000"/>
-                </a:solidFill>
-                <a:latin typeface="Calibri"/>
-              </a:defRPr>
-            </a:pPr>
-            <a:r>
-              <a:t>Repeat</a:t>
-            </a:r>
           </a:p>
         </p:txBody>
       </p:sp>
@@ -7326,7 +7348,7 @@
               </a:defRPr>
             </a:pPr>
             <a:r>
-              <a:t>Integration with Navigator</a:t>
+              <a:t>Re-routing After Detection</a:t>
             </a:r>
           </a:p>
         </p:txBody>
@@ -7354,10 +7376,7 @@
           <a:lstStyle/>
           <a:p>
             <a:pPr>
-              <a:spcAft>
-                <a:spcPts val="400"/>
-              </a:spcAft>
-              <a:defRPr sz="2000" b="1">
+              <a:defRPr sz="1800" b="1">
                 <a:solidFill>
                   <a:srgbClr val="1B3A5C"/>
                 </a:solidFill>
@@ -7365,21 +7384,8 @@
               </a:defRPr>
             </a:pPr>
             <a:r>
-              <a:t>Putting it all together — obstacle detection inside the navigation loop:</a:t>
-            </a:r>
-          </a:p>
-          <a:p>
-            <a:pPr>
-              <a:spcAft>
-                <a:spcPts val="400"/>
-              </a:spcAft>
-              <a:defRPr sz="400" b="0">
-                <a:solidFill>
-                  <a:srgbClr val="000000"/>
-                </a:solidFill>
-                <a:latin typeface="Calibri"/>
-              </a:defRPr>
-            </a:pPr>
+              <a:t>After discovering a new obstacle, rebuild the graph and recompute the path using the updated blocked list.</a:t>
+            </a:r>
           </a:p>
         </p:txBody>
       </p:sp>
@@ -7391,8 +7397,8 @@
         </p:nvSpPr>
         <p:spPr>
           <a:xfrm>
-            <a:off x="548640" y="1371600"/>
-            <a:ext cx="10972800" cy="3200400"/>
+            <a:off x="548640" y="1645920"/>
+            <a:ext cx="5669280" cy="3474720"/>
           </a:xfrm>
           <a:prstGeom prst="roundRect">
             <a:avLst/>
@@ -7436,8 +7442,8 @@
         </p:nvSpPr>
         <p:spPr>
           <a:xfrm>
-            <a:off x="731520" y="1463040"/>
-            <a:ext cx="10607040" cy="3017520"/>
+            <a:off x="731520" y="1737360"/>
+            <a:ext cx="5303520" cy="3291840"/>
           </a:xfrm>
           <a:prstGeom prst="rect">
             <a:avLst/>
@@ -7454,7 +7460,7 @@
               <a:spcAft>
                 <a:spcPts val="100"/>
               </a:spcAft>
-              <a:defRPr sz="1300">
+              <a:defRPr sz="1800">
                 <a:solidFill>
                   <a:srgbClr val="333333"/>
                 </a:solidFill>
@@ -7462,7 +7468,7 @@
               </a:defRPr>
             </a:pPr>
             <a:r>
-              <a:t>from dijkstra import Dijkstra</a:t>
+              <a:t># At each intersection, before driving to the next one:</a:t>
             </a:r>
           </a:p>
           <a:p>
@@ -7470,7 +7476,7 @@
               <a:spcAft>
                 <a:spcPts val="100"/>
               </a:spcAft>
-              <a:defRPr sz="1300">
+              <a:defRPr sz="1800">
                 <a:solidFill>
                   <a:srgbClr val="333333"/>
                 </a:solidFill>
@@ -7478,7 +7484,7 @@
               </a:defRPr>
             </a:pPr>
             <a:r>
-              <a:t>from navigator import Navigator</a:t>
+              <a:t>distance = rangefinder.distance()</a:t>
             </a:r>
           </a:p>
           <a:p>
@@ -7486,36 +7492,36 @@
               <a:spcAft>
                 <a:spcPts val="100"/>
               </a:spcAft>
-              <a:defRPr sz="1300">
+              <a:defRPr sz="1800">
                 <a:solidFill>
                   <a:srgbClr val="333333"/>
                 </a:solidFill>
                 <a:latin typeface="Courier New"/>
               </a:defRPr>
             </a:pPr>
-            <a:r>
-              <a:t>from XRPLib.rangefinder import Rangefinder</a:t>
-            </a:r>
           </a:p>
           <a:p>
             <a:pPr>
               <a:spcAft>
                 <a:spcPts val="100"/>
               </a:spcAft>
-              <a:defRPr sz="1300">
+              <a:defRPr sz="1800">
                 <a:solidFill>
                   <a:srgbClr val="333333"/>
                 </a:solidFill>
                 <a:latin typeface="Courier New"/>
               </a:defRPr>
             </a:pPr>
+            <a:r>
+              <a:t>if distance &lt; OBSTACLE_THRESHOLD:</a:t>
+            </a:r>
           </a:p>
           <a:p>
             <a:pPr>
               <a:spcAft>
                 <a:spcPts val="100"/>
               </a:spcAft>
-              <a:defRPr sz="1300">
+              <a:defRPr sz="1800">
                 <a:solidFill>
                   <a:srgbClr val="333333"/>
                 </a:solidFill>
@@ -7523,7 +7529,7 @@
               </a:defRPr>
             </a:pPr>
             <a:r>
-              <a:t>rangefinder = Rangefinder.get_default_rangefinder()</a:t>
+              <a:t>    blocked_node = get_next_intersection(current_pos, heading)</a:t>
             </a:r>
           </a:p>
           <a:p>
@@ -7531,7 +7537,7 @@
               <a:spcAft>
                 <a:spcPts val="100"/>
               </a:spcAft>
-              <a:defRPr sz="1300">
+              <a:defRPr sz="1800">
                 <a:solidFill>
                   <a:srgbClr val="333333"/>
                 </a:solidFill>
@@ -7539,7 +7545,7 @@
               </a:defRPr>
             </a:pPr>
             <a:r>
-              <a:t>blocked_nodes = []</a:t>
+              <a:t>    if blocked_node not in blocked_list:</a:t>
             </a:r>
           </a:p>
           <a:p>
@@ -7547,7 +7553,7 @@
               <a:spcAft>
                 <a:spcPts val="100"/>
               </a:spcAft>
-              <a:defRPr sz="1300">
+              <a:defRPr sz="1800">
                 <a:solidFill>
                   <a:srgbClr val="333333"/>
                 </a:solidFill>
@@ -7555,7 +7561,7 @@
               </a:defRPr>
             </a:pPr>
             <a:r>
-              <a:t>THRESHOLD = 15</a:t>
+              <a:t>        blocked_list.append(blocked_node)</a:t>
             </a:r>
           </a:p>
           <a:p>
@@ -7563,20 +7569,23 @@
               <a:spcAft>
                 <a:spcPts val="100"/>
               </a:spcAft>
-              <a:defRPr sz="1300">
+              <a:defRPr sz="1800">
                 <a:solidFill>
                   <a:srgbClr val="333333"/>
                 </a:solidFill>
                 <a:latin typeface="Courier New"/>
               </a:defRPr>
             </a:pPr>
+            <a:r>
+              <a:t>        print(f"Obstacle detected at {blocked_node}!")</a:t>
+            </a:r>
           </a:p>
           <a:p>
             <a:pPr>
               <a:spcAft>
                 <a:spcPts val="100"/>
               </a:spcAft>
-              <a:defRPr sz="1300">
+              <a:defRPr sz="1800">
                 <a:solidFill>
                   <a:srgbClr val="333333"/>
                 </a:solidFill>
@@ -7584,7 +7593,7 @@
               </a:defRPr>
             </a:pPr>
             <a:r>
-              <a:t>current = (0, 0)</a:t>
+              <a:t>        print(f"Blocked list is now: {blocked_list}")</a:t>
             </a:r>
           </a:p>
           <a:p>
@@ -7592,36 +7601,36 @@
               <a:spcAft>
                 <a:spcPts val="100"/>
               </a:spcAft>
-              <a:defRPr sz="1300">
+              <a:defRPr sz="1800">
                 <a:solidFill>
                   <a:srgbClr val="333333"/>
                 </a:solidFill>
                 <a:latin typeface="Courier New"/>
               </a:defRPr>
             </a:pPr>
-            <a:r>
-              <a:t>destination = (3, 3)</a:t>
-            </a:r>
           </a:p>
           <a:p>
             <a:pPr>
               <a:spcAft>
                 <a:spcPts val="100"/>
               </a:spcAft>
-              <a:defRPr sz="1300">
+              <a:defRPr sz="1800">
                 <a:solidFill>
                   <a:srgbClr val="333333"/>
                 </a:solidFill>
                 <a:latin typeface="Courier New"/>
               </a:defRPr>
             </a:pPr>
+            <a:r>
+              <a:t>        # Recompute the path with updated blocked list</a:t>
+            </a:r>
           </a:p>
           <a:p>
             <a:pPr>
               <a:spcAft>
                 <a:spcPts val="100"/>
               </a:spcAft>
-              <a:defRPr sz="1300">
+              <a:defRPr sz="1800">
                 <a:solidFill>
                   <a:srgbClr val="333333"/>
                 </a:solidFill>
@@ -7629,7 +7638,7 @@
               </a:defRPr>
             </a:pPr>
             <a:r>
-              <a:t>pathfinder = Dijkstra(current, blocked_nodes)</a:t>
+              <a:t>        graph = build_dijkstra_graph(rows, cols, blocked_list)</a:t>
             </a:r>
           </a:p>
           <a:p>
@@ -7637,7 +7646,7 @@
               <a:spcAft>
                 <a:spcPts val="100"/>
               </a:spcAft>
-              <a:defRPr sz="1300">
+              <a:defRPr sz="1800">
                 <a:solidFill>
                   <a:srgbClr val="333333"/>
                 </a:solidFill>
@@ -7645,7 +7654,7 @@
               </a:defRPr>
             </a:pPr>
             <a:r>
-              <a:t>path = pathfinder.compute_path(destination)</a:t>
+              <a:t>        new_path = compute_dijkstra_path(current_pos, destination, graph)</a:t>
             </a:r>
           </a:p>
           <a:p>
@@ -7653,220 +7662,15 @@
               <a:spcAft>
                 <a:spcPts val="100"/>
               </a:spcAft>
-              <a:defRPr sz="1300">
+              <a:defRPr sz="1800">
                 <a:solidFill>
                   <a:srgbClr val="333333"/>
                 </a:solidFill>
                 <a:latin typeface="Courier New"/>
               </a:defRPr>
             </a:pPr>
-          </a:p>
-          <a:p>
-            <a:pPr>
-              <a:spcAft>
-                <a:spcPts val="100"/>
-              </a:spcAft>
-              <a:defRPr sz="1300">
-                <a:solidFill>
-                  <a:srgbClr val="333333"/>
-                </a:solidFill>
-                <a:latin typeface="Courier New"/>
-              </a:defRPr>
-            </a:pPr>
-            <a:r>
-              <a:t>for i in range(len(path) - 1):</a:t>
-            </a:r>
-          </a:p>
-          <a:p>
-            <a:pPr>
-              <a:spcAft>
-                <a:spcPts val="100"/>
-              </a:spcAft>
-              <a:defRPr sz="1300">
-                <a:solidFill>
-                  <a:srgbClr val="333333"/>
-                </a:solidFill>
-                <a:latin typeface="Courier New"/>
-              </a:defRPr>
-            </a:pPr>
-            <a:r>
-              <a:t>    # Check ahead before driving</a:t>
-            </a:r>
-          </a:p>
-          <a:p>
-            <a:pPr>
-              <a:spcAft>
-                <a:spcPts val="100"/>
-              </a:spcAft>
-              <a:defRPr sz="1300">
-                <a:solidFill>
-                  <a:srgbClr val="333333"/>
-                </a:solidFill>
-                <a:latin typeface="Courier New"/>
-              </a:defRPr>
-            </a:pPr>
-            <a:r>
-              <a:t>    distance = rangefinder.distance()</a:t>
-            </a:r>
-          </a:p>
-          <a:p>
-            <a:pPr>
-              <a:spcAft>
-                <a:spcPts val="100"/>
-              </a:spcAft>
-              <a:defRPr sz="1300">
-                <a:solidFill>
-                  <a:srgbClr val="333333"/>
-                </a:solidFill>
-                <a:latin typeface="Courier New"/>
-              </a:defRPr>
-            </a:pPr>
-            <a:r>
-              <a:t>    if distance &lt; THRESHOLD:</a:t>
-            </a:r>
-          </a:p>
-          <a:p>
-            <a:pPr>
-              <a:spcAft>
-                <a:spcPts val="100"/>
-              </a:spcAft>
-              <a:defRPr sz="1300">
-                <a:solidFill>
-                  <a:srgbClr val="333333"/>
-                </a:solidFill>
-                <a:latin typeface="Courier New"/>
-              </a:defRPr>
-            </a:pPr>
-            <a:r>
-              <a:t>        # Add next intersection to blocked list</a:t>
-            </a:r>
-          </a:p>
-          <a:p>
-            <a:pPr>
-              <a:spcAft>
-                <a:spcPts val="100"/>
-              </a:spcAft>
-              <a:defRPr sz="1300">
-                <a:solidFill>
-                  <a:srgbClr val="333333"/>
-                </a:solidFill>
-                <a:latin typeface="Courier New"/>
-              </a:defRPr>
-            </a:pPr>
-            <a:r>
-              <a:t>        blocked_nodes.append(path[i + 1])</a:t>
-            </a:r>
-          </a:p>
-          <a:p>
-            <a:pPr>
-              <a:spcAft>
-                <a:spcPts val="100"/>
-              </a:spcAft>
-              <a:defRPr sz="1300">
-                <a:solidFill>
-                  <a:srgbClr val="333333"/>
-                </a:solidFill>
-                <a:latin typeface="Courier New"/>
-              </a:defRPr>
-            </a:pPr>
-            <a:r>
-              <a:t>        # Recompute from current position</a:t>
-            </a:r>
-          </a:p>
-          <a:p>
-            <a:pPr>
-              <a:spcAft>
-                <a:spcPts val="100"/>
-              </a:spcAft>
-              <a:defRPr sz="1300">
-                <a:solidFill>
-                  <a:srgbClr val="333333"/>
-                </a:solidFill>
-                <a:latin typeface="Courier New"/>
-              </a:defRPr>
-            </a:pPr>
-            <a:r>
-              <a:t>        pathfinder = Dijkstra(path[i], blocked_nodes)</a:t>
-            </a:r>
-          </a:p>
-          <a:p>
-            <a:pPr>
-              <a:spcAft>
-                <a:spcPts val="100"/>
-              </a:spcAft>
-              <a:defRPr sz="1300">
-                <a:solidFill>
-                  <a:srgbClr val="333333"/>
-                </a:solidFill>
-                <a:latin typeface="Courier New"/>
-              </a:defRPr>
-            </a:pPr>
-            <a:r>
-              <a:t>        path = pathfinder.compute_path(destination)</a:t>
-            </a:r>
-          </a:p>
-          <a:p>
-            <a:pPr>
-              <a:spcAft>
-                <a:spcPts val="100"/>
-              </a:spcAft>
-              <a:defRPr sz="1300">
-                <a:solidFill>
-                  <a:srgbClr val="333333"/>
-                </a:solidFill>
-                <a:latin typeface="Courier New"/>
-              </a:defRPr>
-            </a:pPr>
-            <a:r>
-              <a:t>        # Restart loop with new path</a:t>
-            </a:r>
-          </a:p>
-          <a:p>
-            <a:pPr>
-              <a:spcAft>
-                <a:spcPts val="100"/>
-              </a:spcAft>
-              <a:defRPr sz="1300">
-                <a:solidFill>
-                  <a:srgbClr val="333333"/>
-                </a:solidFill>
-                <a:latin typeface="Courier New"/>
-              </a:defRPr>
-            </a:pPr>
-            <a:r>
-              <a:t>        break</a:t>
-            </a:r>
-          </a:p>
-          <a:p>
-            <a:pPr>
-              <a:spcAft>
-                <a:spcPts val="100"/>
-              </a:spcAft>
-              <a:defRPr sz="1300">
-                <a:solidFill>
-                  <a:srgbClr val="333333"/>
-                </a:solidFill>
-                <a:latin typeface="Courier New"/>
-              </a:defRPr>
-            </a:pPr>
-            <a:r>
-              <a:t>    # Drive to next intersection</a:t>
-            </a:r>
-          </a:p>
-          <a:p>
-            <a:pPr>
-              <a:spcAft>
-                <a:spcPts val="100"/>
-              </a:spcAft>
-              <a:defRPr sz="1300">
-                <a:solidFill>
-                  <a:srgbClr val="333333"/>
-                </a:solidFill>
-                <a:latin typeface="Courier New"/>
-              </a:defRPr>
-            </a:pPr>
-            <a:r>
-              <a:t>    # nav.drive_segment(path[i], path[i + 1])</a:t>
+            <a:r>
+              <a:t>        print(f"New path: {new_path}")</a:t>
             </a:r>
           </a:p>
         </p:txBody>
@@ -7879,8 +7683,8 @@
         </p:nvSpPr>
         <p:spPr>
           <a:xfrm>
-            <a:off x="548640" y="4709160"/>
-            <a:ext cx="10972800" cy="365760"/>
+            <a:off x="6583680" y="1645920"/>
+            <a:ext cx="5029200" cy="3474720"/>
           </a:xfrm>
           <a:prstGeom prst="rect">
             <a:avLst/>
@@ -7894,18 +7698,31 @@
           <a:lstStyle/>
           <a:p>
             <a:pPr>
+              <a:defRPr sz="1800" b="1">
+                <a:solidFill>
+                  <a:srgbClr val="1B3A5C"/>
+                </a:solidFill>
+                <a:latin typeface="Calibri"/>
+              </a:defRPr>
+            </a:pPr>
+            <a:r>
+              <a:t>The flow:</a:t>
+            </a:r>
+          </a:p>
+          <a:p>
+            <a:pPr>
               <a:spcAft>
                 <a:spcPts val="400"/>
               </a:spcAft>
-              <a:defRPr sz="2000" b="1">
-                <a:solidFill>
-                  <a:srgbClr val="1B3A5C"/>
-                </a:solidFill>
-                <a:latin typeface="Calibri"/>
-              </a:defRPr>
-            </a:pPr>
-            <a:r>
-              <a:t>Note: This is a simplified version. The full implementation will handle the loop restart more cleanly.</a:t>
+              <a:defRPr sz="1600" b="0">
+                <a:solidFill>
+                  <a:srgbClr val="000000"/>
+                </a:solidFill>
+                <a:latin typeface="Calibri"/>
+              </a:defRPr>
+            </a:pPr>
+            <a:r>
+              <a:t>Robot arrives at intersection</a:t>
             </a:r>
           </a:p>
           <a:p>
@@ -7913,13 +7730,80 @@
               <a:spcAft>
                 <a:spcPts val="400"/>
               </a:spcAft>
-              <a:defRPr sz="400" b="0">
+              <a:defRPr sz="1600" b="0">
                 <a:solidFill>
                   <a:srgbClr val="000000"/>
                 </a:solidFill>
                 <a:latin typeface="Calibri"/>
               </a:defRPr>
             </a:pPr>
+            <a:r>
+              <a:t>Check rangefinder for obstacle ahead</a:t>
+            </a:r>
+          </a:p>
+          <a:p>
+            <a:pPr>
+              <a:spcAft>
+                <a:spcPts val="400"/>
+              </a:spcAft>
+              <a:defRPr sz="1600" b="0">
+                <a:solidFill>
+                  <a:srgbClr val="000000"/>
+                </a:solidFill>
+                <a:latin typeface="Calibri"/>
+              </a:defRPr>
+            </a:pPr>
+            <a:r>
+              <a:t>If blocked: add to blocked list, rebuild the graph, recompute path from current position</a:t>
+            </a:r>
+          </a:p>
+          <a:p>
+            <a:pPr>
+              <a:spcAft>
+                <a:spcPts val="400"/>
+              </a:spcAft>
+              <a:defRPr sz="1600" b="0">
+                <a:solidFill>
+                  <a:srgbClr val="000000"/>
+                </a:solidFill>
+                <a:latin typeface="Calibri"/>
+              </a:defRPr>
+            </a:pPr>
+            <a:r>
+              <a:t>If clear: continue on current path</a:t>
+            </a:r>
+          </a:p>
+          <a:p>
+            <a:pPr>
+              <a:spcAft>
+                <a:spcPts val="400"/>
+              </a:spcAft>
+              <a:defRPr sz="1600" b="0">
+                <a:solidFill>
+                  <a:srgbClr val="000000"/>
+                </a:solidFill>
+                <a:latin typeface="Calibri"/>
+              </a:defRPr>
+            </a:pPr>
+            <a:r>
+              <a:t>Drive to next intersection</a:t>
+            </a:r>
+          </a:p>
+          <a:p>
+            <a:pPr>
+              <a:spcAft>
+                <a:spcPts val="400"/>
+              </a:spcAft>
+              <a:defRPr sz="1600" b="0">
+                <a:solidFill>
+                  <a:srgbClr val="000000"/>
+                </a:solidFill>
+                <a:latin typeface="Calibri"/>
+              </a:defRPr>
+            </a:pPr>
+            <a:r>
+              <a:t>Repeat</a:t>
+            </a:r>
           </a:p>
         </p:txBody>
       </p:sp>
@@ -8143,7 +8027,7 @@
               <a:spcAft>
                 <a:spcPts val="100"/>
               </a:spcAft>
-              <a:defRPr sz="1300">
+              <a:defRPr sz="1800">
                 <a:solidFill>
                   <a:srgbClr val="333333"/>
                 </a:solidFill>
@@ -8159,7 +8043,7 @@
               <a:spcAft>
                 <a:spcPts val="100"/>
               </a:spcAft>
-              <a:defRPr sz="1300">
+              <a:defRPr sz="1800">
                 <a:solidFill>
                   <a:srgbClr val="333333"/>
                 </a:solidFill>
